--- a/Documentacion/GymProgress.pptx
+++ b/Documentacion/GymProgress.pptx
@@ -1150,13 +1150,13 @@
       <dgm:prSet presAssocID="{11417911-D3DF-4A11-961E-7D5DB45A200E}" presName="iconRect" presStyleLbl="node1" presStyleIdx="0" presStyleCnt="2"/>
       <dgm:spPr>
         <a:blipFill>
-          <a:blip xmlns:r="http://schemas.openxmlformats.org/officeDocument/2006/relationships">
+          <a:blip xmlns:r="http://schemas.openxmlformats.org/officeDocument/2006/relationships" r:embed="rId1">
             <a:extLst>
               <a:ext uri="{28A0092B-C50C-407E-A947-70E740481C1C}">
                 <a14:useLocalDpi xmlns:a14="http://schemas.microsoft.com/office/drawing/2010/main" val="0"/>
               </a:ext>
               <a:ext uri="{96DAC541-7B7A-43D3-8B79-37D633B846F1}">
-                <asvg:svgBlip xmlns:asvg="http://schemas.microsoft.com/office/drawing/2016/SVG/main" r:embed="rId1"/>
+                <asvg:svgBlip xmlns:asvg="http://schemas.microsoft.com/office/drawing/2016/SVG/main" r:embed="rId2"/>
               </a:ext>
             </a:extLst>
           </a:blip>
@@ -1199,13 +1199,13 @@
       <dgm:prSet presAssocID="{40D154E5-0490-4679-8440-495AA42DE10A}" presName="iconRect" presStyleLbl="node1" presStyleIdx="1" presStyleCnt="2"/>
       <dgm:spPr>
         <a:blipFill>
-          <a:blip xmlns:r="http://schemas.openxmlformats.org/officeDocument/2006/relationships">
+          <a:blip xmlns:r="http://schemas.openxmlformats.org/officeDocument/2006/relationships" r:embed="rId3">
             <a:extLst>
               <a:ext uri="{28A0092B-C50C-407E-A947-70E740481C1C}">
                 <a14:useLocalDpi xmlns:a14="http://schemas.microsoft.com/office/drawing/2010/main" val="0"/>
               </a:ext>
               <a:ext uri="{96DAC541-7B7A-43D3-8B79-37D633B846F1}">
-                <asvg:svgBlip xmlns:asvg="http://schemas.microsoft.com/office/drawing/2016/SVG/main" r:embed="rId2"/>
+                <asvg:svgBlip xmlns:asvg="http://schemas.microsoft.com/office/drawing/2016/SVG/main" r:embed="rId4"/>
               </a:ext>
             </a:extLst>
           </a:blip>
@@ -1285,13 +1285,13 @@
           <a:avLst/>
         </a:prstGeom>
         <a:blipFill>
-          <a:blip xmlns:r="http://schemas.openxmlformats.org/officeDocument/2006/relationships">
+          <a:blip xmlns:r="http://schemas.openxmlformats.org/officeDocument/2006/relationships" r:embed="rId1">
             <a:extLst>
               <a:ext uri="{28A0092B-C50C-407E-A947-70E740481C1C}">
                 <a14:useLocalDpi xmlns:a14="http://schemas.microsoft.com/office/drawing/2010/main" val="0"/>
               </a:ext>
               <a:ext uri="{96DAC541-7B7A-43D3-8B79-37D633B846F1}">
-                <asvg:svgBlip xmlns:asvg="http://schemas.microsoft.com/office/drawing/2016/SVG/main" r:embed="rId1"/>
+                <asvg:svgBlip xmlns:asvg="http://schemas.microsoft.com/office/drawing/2016/SVG/main" r:embed="rId2"/>
               </a:ext>
             </a:extLst>
           </a:blip>
@@ -1358,7 +1358,7 @@
         </a:bodyPr>
         <a:lstStyle/>
         <a:p>
-          <a:pPr marL="0" lvl="0" indent="0" algn="ctr" defTabSz="1466850">
+          <a:pPr marL="0" lvl="0" indent="0" algn="ctr" defTabSz="1333500">
             <a:lnSpc>
               <a:spcPct val="90000"/>
             </a:lnSpc>
@@ -1371,10 +1371,10 @@
             <a:buNone/>
           </a:pPr>
           <a:r>
-            <a:rPr lang="es-ES" sz="3300" kern="1200"/>
+            <a:rPr lang="es-ES" sz="3000" kern="1200"/>
             <a:t>Entrenadores personales</a:t>
           </a:r>
-          <a:endParaRPr lang="en-US" sz="3300" kern="1200"/>
+          <a:endParaRPr lang="en-US" sz="3000" kern="1200"/>
         </a:p>
       </dsp:txBody>
       <dsp:txXfrm>
@@ -1396,13 +1396,13 @@
           <a:avLst/>
         </a:prstGeom>
         <a:blipFill>
-          <a:blip xmlns:r="http://schemas.openxmlformats.org/officeDocument/2006/relationships">
+          <a:blip xmlns:r="http://schemas.openxmlformats.org/officeDocument/2006/relationships" r:embed="rId3">
             <a:extLst>
               <a:ext uri="{28A0092B-C50C-407E-A947-70E740481C1C}">
                 <a14:useLocalDpi xmlns:a14="http://schemas.microsoft.com/office/drawing/2010/main" val="0"/>
               </a:ext>
               <a:ext uri="{96DAC541-7B7A-43D3-8B79-37D633B846F1}">
-                <asvg:svgBlip xmlns:asvg="http://schemas.microsoft.com/office/drawing/2016/SVG/main" r:embed="rId2"/>
+                <asvg:svgBlip xmlns:asvg="http://schemas.microsoft.com/office/drawing/2016/SVG/main" r:embed="rId4"/>
               </a:ext>
             </a:extLst>
           </a:blip>
@@ -1469,7 +1469,7 @@
         </a:bodyPr>
         <a:lstStyle/>
         <a:p>
-          <a:pPr marL="0" lvl="0" indent="0" algn="ctr" defTabSz="1466850">
+          <a:pPr marL="0" lvl="0" indent="0" algn="ctr" defTabSz="1333500">
             <a:lnSpc>
               <a:spcPct val="90000"/>
             </a:lnSpc>
@@ -1482,10 +1482,10 @@
             <a:buNone/>
           </a:pPr>
           <a:r>
-            <a:rPr lang="es-ES" sz="3300" kern="1200"/>
+            <a:rPr lang="es-ES" sz="3000" kern="1200"/>
             <a:t>Base de datos local</a:t>
           </a:r>
-          <a:endParaRPr lang="en-US" sz="3300" kern="1200"/>
+          <a:endParaRPr lang="en-US" sz="3000" kern="1200"/>
         </a:p>
       </dsp:txBody>
       <dsp:txXfrm>
@@ -2803,7 +2803,7 @@
           <a:p>
             <a:fld id="{FCD0094E-15F9-4628-96A1-11E8D4FD3518}" type="datetimeFigureOut">
               <a:rPr lang="es-ES" smtClean="0"/>
-              <a:t>24/05/2026</a:t>
+              <a:t>25/05/2026</a:t>
             </a:fld>
             <a:endParaRPr lang="es-ES"/>
           </a:p>
@@ -3266,7 +3266,7 @@
           <a:p>
             <a:fld id="{5DBDDF98-C922-483F-97E9-3E76B0201B42}" type="datetimeFigureOut">
               <a:rPr lang="en-US" smtClean="0"/>
-              <a:t>5/24/2026</a:t>
+              <a:t>5/25/2026</a:t>
             </a:fld>
             <a:endParaRPr lang="en-US"/>
           </a:p>
@@ -3504,7 +3504,7 @@
           <a:p>
             <a:fld id="{5DBDDF98-C922-483F-97E9-3E76B0201B42}" type="datetimeFigureOut">
               <a:rPr lang="en-US" smtClean="0"/>
-              <a:t>5/24/2026</a:t>
+              <a:t>5/25/2026</a:t>
             </a:fld>
             <a:endParaRPr lang="en-US"/>
           </a:p>
@@ -3712,7 +3712,7 @@
           <a:p>
             <a:fld id="{5DBDDF98-C922-483F-97E9-3E76B0201B42}" type="datetimeFigureOut">
               <a:rPr lang="en-US" smtClean="0"/>
-              <a:t>5/24/2026</a:t>
+              <a:t>5/25/2026</a:t>
             </a:fld>
             <a:endParaRPr lang="en-US"/>
           </a:p>
@@ -3910,7 +3910,7 @@
           <a:p>
             <a:fld id="{5DBDDF98-C922-483F-97E9-3E76B0201B42}" type="datetimeFigureOut">
               <a:rPr lang="en-US" smtClean="0"/>
-              <a:t>5/24/2026</a:t>
+              <a:t>5/25/2026</a:t>
             </a:fld>
             <a:endParaRPr lang="en-US"/>
           </a:p>
@@ -4187,7 +4187,7 @@
           <a:p>
             <a:fld id="{5DBDDF98-C922-483F-97E9-3E76B0201B42}" type="datetimeFigureOut">
               <a:rPr lang="en-US" smtClean="0"/>
-              <a:t>5/24/2026</a:t>
+              <a:t>5/25/2026</a:t>
             </a:fld>
             <a:endParaRPr lang="en-US"/>
           </a:p>
@@ -4452,7 +4452,7 @@
           <a:p>
             <a:fld id="{5DBDDF98-C922-483F-97E9-3E76B0201B42}" type="datetimeFigureOut">
               <a:rPr lang="en-US" smtClean="0"/>
-              <a:t>5/24/2026</a:t>
+              <a:t>5/25/2026</a:t>
             </a:fld>
             <a:endParaRPr lang="en-US"/>
           </a:p>
@@ -4868,7 +4868,7 @@
           <a:p>
             <a:fld id="{5DBDDF98-C922-483F-97E9-3E76B0201B42}" type="datetimeFigureOut">
               <a:rPr lang="en-US" smtClean="0"/>
-              <a:t>5/24/2026</a:t>
+              <a:t>5/25/2026</a:t>
             </a:fld>
             <a:endParaRPr lang="en-US"/>
           </a:p>
@@ -5095,7 +5095,7 @@
           <a:p>
             <a:fld id="{5DBDDF98-C922-483F-97E9-3E76B0201B42}" type="datetimeFigureOut">
               <a:rPr lang="en-US" smtClean="0"/>
-              <a:t>5/24/2026</a:t>
+              <a:t>5/25/2026</a:t>
             </a:fld>
             <a:endParaRPr lang="en-US"/>
           </a:p>
@@ -5208,7 +5208,7 @@
           <a:p>
             <a:fld id="{5DBDDF98-C922-483F-97E9-3E76B0201B42}" type="datetimeFigureOut">
               <a:rPr lang="en-US" smtClean="0"/>
-              <a:t>5/24/2026</a:t>
+              <a:t>5/25/2026</a:t>
             </a:fld>
             <a:endParaRPr lang="en-US"/>
           </a:p>
@@ -5525,7 +5525,7 @@
           <a:p>
             <a:fld id="{5DBDDF98-C922-483F-97E9-3E76B0201B42}" type="datetimeFigureOut">
               <a:rPr lang="en-US" smtClean="0"/>
-              <a:t>5/24/2026</a:t>
+              <a:t>5/25/2026</a:t>
             </a:fld>
             <a:endParaRPr lang="en-US"/>
           </a:p>
@@ -5817,7 +5817,7 @@
           <a:p>
             <a:fld id="{5DBDDF98-C922-483F-97E9-3E76B0201B42}" type="datetimeFigureOut">
               <a:rPr lang="en-US" smtClean="0"/>
-              <a:t>5/24/2026</a:t>
+              <a:t>5/25/2026</a:t>
             </a:fld>
             <a:endParaRPr lang="en-US"/>
           </a:p>
@@ -6058,7 +6058,7 @@
             <a:fld id="{5DBDDF98-C922-483F-97E9-3E76B0201B42}" type="datetimeFigureOut">
               <a:rPr lang="en-US" smtClean="0"/>
               <a:pPr/>
-              <a:t>5/24/2026</a:t>
+              <a:t>5/25/2026</a:t>
             </a:fld>
             <a:endParaRPr lang="en-US"/>
           </a:p>
@@ -9329,8 +9329,8 @@
         </p:nvSpPr>
         <p:spPr>
           <a:xfrm>
-            <a:off x="1295400" y="2262188"/>
-            <a:ext cx="4145280" cy="2443163"/>
+            <a:off x="1295399" y="2262188"/>
+            <a:ext cx="4208929" cy="2443163"/>
           </a:xfrm>
         </p:spPr>
         <p:txBody>
@@ -9406,8 +9406,8 @@
         </p:nvSpPr>
         <p:spPr>
           <a:xfrm>
-            <a:off x="6382512" y="2152650"/>
-            <a:ext cx="4809744" cy="646331"/>
+            <a:off x="6400441" y="2263309"/>
+            <a:ext cx="4809744" cy="2031325"/>
           </a:xfrm>
           <a:prstGeom prst="rect">
             <a:avLst/>
@@ -9424,6 +9424,122 @@
               <a:rPr lang="es-ES" dirty="0"/>
               <a:t>Desarrollo Servidor</a:t>
             </a:r>
+          </a:p>
+          <a:p>
+            <a:pPr marL="285750" indent="-285750">
+              <a:buFont typeface="Arial" panose="020B0604020202020204" pitchFamily="34" charset="0"/>
+              <a:buChar char="•"/>
+            </a:pPr>
+            <a:r>
+              <a:rPr lang="es-ES" dirty="0">
+                <a:hlinkClick r:id="rId6"/>
+              </a:rPr>
+              <a:t>https://docs.spring.io/spring-boot/docs/current/reference/html/</a:t>
+            </a:r>
+            <a:endParaRPr lang="es-ES" dirty="0"/>
+          </a:p>
+          <a:p>
+            <a:pPr marL="285750" indent="-285750">
+              <a:buFont typeface="Arial" panose="020B0604020202020204" pitchFamily="34" charset="0"/>
+              <a:buChar char="•"/>
+            </a:pPr>
+            <a:r>
+              <a:rPr lang="es-ES" dirty="0">
+                <a:hlinkClick r:id="rId7"/>
+              </a:rPr>
+              <a:t>https://docs.oracle.com/en/java/</a:t>
+            </a:r>
+            <a:endParaRPr lang="es-ES" dirty="0"/>
+          </a:p>
+          <a:p>
+            <a:pPr marL="285750" indent="-285750">
+              <a:buFont typeface="Arial" panose="020B0604020202020204" pitchFamily="34" charset="0"/>
+              <a:buChar char="•"/>
+            </a:pPr>
+            <a:r>
+              <a:rPr lang="es-ES" dirty="0">
+                <a:hlinkClick r:id="rId8"/>
+              </a:rPr>
+              <a:t>https://hibernate.org/orm/documentation/</a:t>
+            </a:r>
+            <a:endParaRPr lang="es-ES" dirty="0"/>
+          </a:p>
+          <a:p>
+            <a:pPr marL="285750" indent="-285750">
+              <a:buFont typeface="Arial" panose="020B0604020202020204" pitchFamily="34" charset="0"/>
+              <a:buChar char="•"/>
+            </a:pPr>
+            <a:r>
+              <a:rPr lang="es-ES" dirty="0">
+                <a:hlinkClick r:id="rId9"/>
+              </a:rPr>
+              <a:t>https://jwt.io/introduction</a:t>
+            </a:r>
+            <a:endParaRPr lang="es-ES" dirty="0"/>
+          </a:p>
+          <a:p>
+            <a:endParaRPr lang="es-ES" dirty="0"/>
+          </a:p>
+        </p:txBody>
+      </p:sp>
+      <p:sp>
+        <p:nvSpPr>
+          <p:cNvPr id="4" name="CuadroTexto 3">
+            <a:extLst>
+              <a:ext uri="{FF2B5EF4-FFF2-40B4-BE49-F238E27FC236}">
+                <a16:creationId xmlns:a16="http://schemas.microsoft.com/office/drawing/2014/main" id="{5B5C32EF-4C77-4C3E-8398-2CCFE6B82433}"/>
+              </a:ext>
+            </a:extLst>
+          </p:cNvPr>
+          <p:cNvSpPr txBox="1"/>
+          <p:nvPr/>
+        </p:nvSpPr>
+        <p:spPr>
+          <a:xfrm>
+            <a:off x="5504328" y="4634754"/>
+            <a:ext cx="3774142" cy="1754326"/>
+          </a:xfrm>
+          <a:prstGeom prst="rect">
+            <a:avLst/>
+          </a:prstGeom>
+          <a:noFill/>
+        </p:spPr>
+        <p:txBody>
+          <a:bodyPr wrap="square" rtlCol="0">
+            <a:spAutoFit/>
+          </a:bodyPr>
+          <a:lstStyle/>
+          <a:p>
+            <a:r>
+              <a:rPr lang="es-ES" dirty="0"/>
+              <a:t>Base de Datos y Almacenamiento</a:t>
+            </a:r>
+          </a:p>
+          <a:p>
+            <a:pPr marL="285750" indent="-285750">
+              <a:buFont typeface="Arial" panose="020B0604020202020204" pitchFamily="34" charset="0"/>
+              <a:buChar char="•"/>
+            </a:pPr>
+            <a:r>
+              <a:rPr lang="es-ES" dirty="0">
+                <a:hlinkClick r:id="rId10"/>
+              </a:rPr>
+              <a:t>https://dev.mysql.com/doc/refman/en/</a:t>
+            </a:r>
+            <a:endParaRPr lang="es-ES" dirty="0"/>
+          </a:p>
+          <a:p>
+            <a:pPr marL="285750" indent="-285750">
+              <a:buFont typeface="Arial" panose="020B0604020202020204" pitchFamily="34" charset="0"/>
+              <a:buChar char="•"/>
+            </a:pPr>
+            <a:r>
+              <a:rPr lang="es-ES" dirty="0">
+                <a:hlinkClick r:id="rId11"/>
+              </a:rPr>
+              <a:t>https://developer.android.com/training/data-storage/room</a:t>
+            </a:r>
+            <a:endParaRPr lang="es-ES" dirty="0"/>
           </a:p>
           <a:p>
             <a:endParaRPr lang="es-ES" dirty="0"/>
@@ -9969,6 +10085,14 @@
 </file>
 
 <file path=customXml/item2.xml><?xml version="1.0" encoding="utf-8"?>
+<p:properties xmlns:p="http://schemas.microsoft.com/office/2006/metadata/properties" xmlns:xsi="http://www.w3.org/2001/XMLSchema-instance" xmlns:pc="http://schemas.microsoft.com/office/infopath/2007/PartnerControls">
+  <documentManagement>
+    <_activity xmlns="d468e08d-9c10-42ed-8ec9-30bcedd173ec" xsi:nil="true"/>
+  </documentManagement>
+</p:properties>
+</file>
+
+<file path=customXml/item3.xml><?xml version="1.0" encoding="utf-8"?>
 <ct:contentTypeSchema xmlns:ct="http://schemas.microsoft.com/office/2006/metadata/contentType" xmlns:ma="http://schemas.microsoft.com/office/2006/metadata/properties/metaAttributes" ct:_="" ma:_="" ma:contentTypeName="Documento" ma:contentTypeID="0x010100C45191AFD27EC94E864B42ACD45005DE" ma:contentTypeVersion="17" ma:contentTypeDescription="Crear nuevo documento." ma:contentTypeScope="" ma:versionID="d357b142e8bd1043c24499238164f58a">
   <xsd:schema xmlns:xsd="http://www.w3.org/2001/XMLSchema" xmlns:xs="http://www.w3.org/2001/XMLSchema" xmlns:p="http://schemas.microsoft.com/office/2006/metadata/properties" xmlns:ns3="d468e08d-9c10-42ed-8ec9-30bcedd173ec" xmlns:ns4="c1cc3250-6f6e-413d-96be-26d04b2d674b" targetNamespace="http://schemas.microsoft.com/office/2006/metadata/properties" ma:root="true" ma:fieldsID="253d5879b3bc868af67a505322d65424" ns3:_="" ns4:_="">
     <xsd:import namespace="d468e08d-9c10-42ed-8ec9-30bcedd173ec"/>
@@ -10215,14 +10339,6 @@
 </ct:contentTypeSchema>
 </file>
 
-<file path=customXml/item3.xml><?xml version="1.0" encoding="utf-8"?>
-<p:properties xmlns:p="http://schemas.microsoft.com/office/2006/metadata/properties" xmlns:xsi="http://www.w3.org/2001/XMLSchema-instance" xmlns:pc="http://schemas.microsoft.com/office/infopath/2007/PartnerControls">
-  <documentManagement>
-    <_activity xmlns="d468e08d-9c10-42ed-8ec9-30bcedd173ec" xsi:nil="true"/>
-  </documentManagement>
-</p:properties>
-</file>
-
 <file path=customXml/itemProps1.xml><?xml version="1.0" encoding="utf-8"?>
 <ds:datastoreItem xmlns:ds="http://schemas.openxmlformats.org/officeDocument/2006/customXml" ds:itemID="{4EEBAED1-4F83-4C83-9AB6-D347309526C4}">
   <ds:schemaRefs>
@@ -10232,6 +10348,23 @@
 </file>
 
 <file path=customXml/itemProps2.xml><?xml version="1.0" encoding="utf-8"?>
+<ds:datastoreItem xmlns:ds="http://schemas.openxmlformats.org/officeDocument/2006/customXml" ds:itemID="{30234281-4B2B-4243-BC3B-04E84E926534}">
+  <ds:schemaRefs>
+    <ds:schemaRef ds:uri="http://purl.org/dc/dcmitype/"/>
+    <ds:schemaRef ds:uri="http://purl.org/dc/elements/1.1/"/>
+    <ds:schemaRef ds:uri="http://www.w3.org/XML/1998/namespace"/>
+    <ds:schemaRef ds:uri="http://purl.org/dc/terms/"/>
+    <ds:schemaRef ds:uri="http://schemas.microsoft.com/office/2006/documentManagement/types"/>
+    <ds:schemaRef ds:uri="http://schemas.microsoft.com/office/2006/metadata/properties"/>
+    <ds:schemaRef ds:uri="http://schemas.openxmlformats.org/package/2006/metadata/core-properties"/>
+    <ds:schemaRef ds:uri="http://schemas.microsoft.com/office/infopath/2007/PartnerControls"/>
+    <ds:schemaRef ds:uri="c1cc3250-6f6e-413d-96be-26d04b2d674b"/>
+    <ds:schemaRef ds:uri="d468e08d-9c10-42ed-8ec9-30bcedd173ec"/>
+  </ds:schemaRefs>
+</ds:datastoreItem>
+</file>
+
+<file path=customXml/itemProps3.xml><?xml version="1.0" encoding="utf-8"?>
 <ds:datastoreItem xmlns:ds="http://schemas.openxmlformats.org/officeDocument/2006/customXml" ds:itemID="{369D6E09-408B-4198-ABDC-DE3CEE1578B8}">
   <ds:schemaRefs>
     <ds:schemaRef ds:uri="http://schemas.microsoft.com/office/2006/metadata/contentType"/>
@@ -10248,21 +10381,4 @@
     <ds:schemaRef ds:uri="http://schemas.microsoft.com/internal/obd"/>
   </ds:schemaRefs>
 </ds:datastoreItem>
-</file>
-
-<file path=customXml/itemProps3.xml><?xml version="1.0" encoding="utf-8"?>
-<ds:datastoreItem xmlns:ds="http://schemas.openxmlformats.org/officeDocument/2006/customXml" ds:itemID="{30234281-4B2B-4243-BC3B-04E84E926534}">
-  <ds:schemaRefs>
-    <ds:schemaRef ds:uri="http://purl.org/dc/dcmitype/"/>
-    <ds:schemaRef ds:uri="http://purl.org/dc/elements/1.1/"/>
-    <ds:schemaRef ds:uri="http://www.w3.org/XML/1998/namespace"/>
-    <ds:schemaRef ds:uri="http://purl.org/dc/terms/"/>
-    <ds:schemaRef ds:uri="http://schemas.microsoft.com/office/2006/documentManagement/types"/>
-    <ds:schemaRef ds:uri="http://schemas.microsoft.com/office/2006/metadata/properties"/>
-    <ds:schemaRef ds:uri="http://schemas.openxmlformats.org/package/2006/metadata/core-properties"/>
-    <ds:schemaRef ds:uri="http://schemas.microsoft.com/office/infopath/2007/PartnerControls"/>
-    <ds:schemaRef ds:uri="c1cc3250-6f6e-413d-96be-26d04b2d674b"/>
-    <ds:schemaRef ds:uri="d468e08d-9c10-42ed-8ec9-30bcedd173ec"/>
-  </ds:schemaRefs>
-</ds:datastoreItem>
 </file>
--- a/Documentacion/GymProgress.pptx
+++ b/Documentacion/GymProgress.pptx
@@ -1150,13 +1150,13 @@
       <dgm:prSet presAssocID="{11417911-D3DF-4A11-961E-7D5DB45A200E}" presName="iconRect" presStyleLbl="node1" presStyleIdx="0" presStyleCnt="2"/>
       <dgm:spPr>
         <a:blipFill>
-          <a:blip xmlns:r="http://schemas.openxmlformats.org/officeDocument/2006/relationships" r:embed="rId1">
+          <a:blip xmlns:r="http://schemas.openxmlformats.org/officeDocument/2006/relationships">
             <a:extLst>
               <a:ext uri="{28A0092B-C50C-407E-A947-70E740481C1C}">
                 <a14:useLocalDpi xmlns:a14="http://schemas.microsoft.com/office/drawing/2010/main" val="0"/>
               </a:ext>
               <a:ext uri="{96DAC541-7B7A-43D3-8B79-37D633B846F1}">
-                <asvg:svgBlip xmlns:asvg="http://schemas.microsoft.com/office/drawing/2016/SVG/main" r:embed="rId2"/>
+                <asvg:svgBlip xmlns:asvg="http://schemas.microsoft.com/office/drawing/2016/SVG/main" r:embed="rId1"/>
               </a:ext>
             </a:extLst>
           </a:blip>
@@ -1199,13 +1199,13 @@
       <dgm:prSet presAssocID="{40D154E5-0490-4679-8440-495AA42DE10A}" presName="iconRect" presStyleLbl="node1" presStyleIdx="1" presStyleCnt="2"/>
       <dgm:spPr>
         <a:blipFill>
-          <a:blip xmlns:r="http://schemas.openxmlformats.org/officeDocument/2006/relationships" r:embed="rId3">
+          <a:blip xmlns:r="http://schemas.openxmlformats.org/officeDocument/2006/relationships">
             <a:extLst>
               <a:ext uri="{28A0092B-C50C-407E-A947-70E740481C1C}">
                 <a14:useLocalDpi xmlns:a14="http://schemas.microsoft.com/office/drawing/2010/main" val="0"/>
               </a:ext>
               <a:ext uri="{96DAC541-7B7A-43D3-8B79-37D633B846F1}">
-                <asvg:svgBlip xmlns:asvg="http://schemas.microsoft.com/office/drawing/2016/SVG/main" r:embed="rId4"/>
+                <asvg:svgBlip xmlns:asvg="http://schemas.microsoft.com/office/drawing/2016/SVG/main" r:embed="rId2"/>
               </a:ext>
             </a:extLst>
           </a:blip>
@@ -1285,13 +1285,13 @@
           <a:avLst/>
         </a:prstGeom>
         <a:blipFill>
-          <a:blip xmlns:r="http://schemas.openxmlformats.org/officeDocument/2006/relationships" r:embed="rId1">
+          <a:blip xmlns:r="http://schemas.openxmlformats.org/officeDocument/2006/relationships">
             <a:extLst>
               <a:ext uri="{28A0092B-C50C-407E-A947-70E740481C1C}">
                 <a14:useLocalDpi xmlns:a14="http://schemas.microsoft.com/office/drawing/2010/main" val="0"/>
               </a:ext>
               <a:ext uri="{96DAC541-7B7A-43D3-8B79-37D633B846F1}">
-                <asvg:svgBlip xmlns:asvg="http://schemas.microsoft.com/office/drawing/2016/SVG/main" r:embed="rId2"/>
+                <asvg:svgBlip xmlns:asvg="http://schemas.microsoft.com/office/drawing/2016/SVG/main" r:embed="rId1"/>
               </a:ext>
             </a:extLst>
           </a:blip>
@@ -1396,13 +1396,13 @@
           <a:avLst/>
         </a:prstGeom>
         <a:blipFill>
-          <a:blip xmlns:r="http://schemas.openxmlformats.org/officeDocument/2006/relationships" r:embed="rId3">
+          <a:blip xmlns:r="http://schemas.openxmlformats.org/officeDocument/2006/relationships">
             <a:extLst>
               <a:ext uri="{28A0092B-C50C-407E-A947-70E740481C1C}">
                 <a14:useLocalDpi xmlns:a14="http://schemas.microsoft.com/office/drawing/2010/main" val="0"/>
               </a:ext>
               <a:ext uri="{96DAC541-7B7A-43D3-8B79-37D633B846F1}">
-                <asvg:svgBlip xmlns:asvg="http://schemas.microsoft.com/office/drawing/2016/SVG/main" r:embed="rId4"/>
+                <asvg:svgBlip xmlns:asvg="http://schemas.microsoft.com/office/drawing/2016/SVG/main" r:embed="rId2"/>
               </a:ext>
             </a:extLst>
           </a:blip>
@@ -9329,7 +9329,7 @@
         </p:nvSpPr>
         <p:spPr>
           <a:xfrm>
-            <a:off x="1295399" y="2262188"/>
+            <a:off x="1295399" y="2152650"/>
             <a:ext cx="4208929" cy="2443163"/>
           </a:xfrm>
         </p:spPr>
@@ -9406,7 +9406,7 @@
         </p:nvSpPr>
         <p:spPr>
           <a:xfrm>
-            <a:off x="6400441" y="2263309"/>
+            <a:off x="6838591" y="3580150"/>
             <a:ext cx="4809744" cy="2031325"/>
           </a:xfrm>
           <a:prstGeom prst="rect">
@@ -9496,7 +9496,7 @@
         </p:nvSpPr>
         <p:spPr>
           <a:xfrm>
-            <a:off x="5504328" y="4634754"/>
+            <a:off x="1295399" y="4595812"/>
             <a:ext cx="3774142" cy="1754326"/>
           </a:xfrm>
           <a:prstGeom prst="rect">
@@ -10076,20 +10076,20 @@
 </file>
 
 <file path=customXml/item1.xml><?xml version="1.0" encoding="utf-8"?>
+<p:properties xmlns:p="http://schemas.microsoft.com/office/2006/metadata/properties" xmlns:xsi="http://www.w3.org/2001/XMLSchema-instance" xmlns:pc="http://schemas.microsoft.com/office/infopath/2007/PartnerControls">
+  <documentManagement>
+    <_activity xmlns="d468e08d-9c10-42ed-8ec9-30bcedd173ec" xsi:nil="true"/>
+  </documentManagement>
+</p:properties>
+</file>
+
+<file path=customXml/item2.xml><?xml version="1.0" encoding="utf-8"?>
 <?mso-contentType ?>
 <FormTemplates xmlns="http://schemas.microsoft.com/sharepoint/v3/contenttype/forms">
   <Display>DocumentLibraryForm</Display>
   <Edit>DocumentLibraryForm</Edit>
   <New>DocumentLibraryForm</New>
 </FormTemplates>
-</file>
-
-<file path=customXml/item2.xml><?xml version="1.0" encoding="utf-8"?>
-<p:properties xmlns:p="http://schemas.microsoft.com/office/2006/metadata/properties" xmlns:xsi="http://www.w3.org/2001/XMLSchema-instance" xmlns:pc="http://schemas.microsoft.com/office/infopath/2007/PartnerControls">
-  <documentManagement>
-    <_activity xmlns="d468e08d-9c10-42ed-8ec9-30bcedd173ec" xsi:nil="true"/>
-  </documentManagement>
-</p:properties>
 </file>
 
 <file path=customXml/item3.xml><?xml version="1.0" encoding="utf-8"?>
@@ -10340,14 +10340,6 @@
 </file>
 
 <file path=customXml/itemProps1.xml><?xml version="1.0" encoding="utf-8"?>
-<ds:datastoreItem xmlns:ds="http://schemas.openxmlformats.org/officeDocument/2006/customXml" ds:itemID="{4EEBAED1-4F83-4C83-9AB6-D347309526C4}">
-  <ds:schemaRefs>
-    <ds:schemaRef ds:uri="http://schemas.microsoft.com/sharepoint/v3/contenttype/forms"/>
-  </ds:schemaRefs>
-</ds:datastoreItem>
-</file>
-
-<file path=customXml/itemProps2.xml><?xml version="1.0" encoding="utf-8"?>
 <ds:datastoreItem xmlns:ds="http://schemas.openxmlformats.org/officeDocument/2006/customXml" ds:itemID="{30234281-4B2B-4243-BC3B-04E84E926534}">
   <ds:schemaRefs>
     <ds:schemaRef ds:uri="http://purl.org/dc/dcmitype/"/>
@@ -10360,6 +10352,14 @@
     <ds:schemaRef ds:uri="http://schemas.microsoft.com/office/infopath/2007/PartnerControls"/>
     <ds:schemaRef ds:uri="c1cc3250-6f6e-413d-96be-26d04b2d674b"/>
     <ds:schemaRef ds:uri="d468e08d-9c10-42ed-8ec9-30bcedd173ec"/>
+  </ds:schemaRefs>
+</ds:datastoreItem>
+</file>
+
+<file path=customXml/itemProps2.xml><?xml version="1.0" encoding="utf-8"?>
+<ds:datastoreItem xmlns:ds="http://schemas.openxmlformats.org/officeDocument/2006/customXml" ds:itemID="{4EEBAED1-4F83-4C83-9AB6-D347309526C4}">
+  <ds:schemaRefs>
+    <ds:schemaRef ds:uri="http://schemas.microsoft.com/sharepoint/v3/contenttype/forms"/>
   </ds:schemaRefs>
 </ds:datastoreItem>
 </file>
